--- a/AUTOMATED STOCK MARKET ETL PIPELINE.pptx
+++ b/AUTOMATED STOCK MARKET ETL PIPELINE.pptx
@@ -5912,7 +5912,7 @@
         </p:spPr>
         <p:txBody>
           <a:bodyPr>
-            <a:normAutofit fontScale="92500" lnSpcReduction="20000"/>
+            <a:normAutofit fontScale="92500" lnSpcReduction="10000"/>
           </a:bodyPr>
           <a:lstStyle>
             <a:lvl1pPr marL="0" indent="0" algn="l" defTabSz="914400" rtl="0" eaLnBrk="1" latinLnBrk="0" hangingPunct="1">
@@ -6087,12 +6087,11 @@
           </a:p>
           <a:p>
             <a:r>
-              <a:rPr lang="en-IN" dirty="0"/>
-              <a:t>Investors and analysts require updated stock market information to monitor market performance and identify trends. Manual collection and reporting are inefficient and time-consuming.</a:t>
-            </a:r>
-          </a:p>
-          <a:p>
-            <a:pPr algn="just"/>
+              <a:rPr lang="en-US" dirty="0"/>
+              <a:t>Stock market updates are crucial for investors and analysts to track market performance and spot trends. Manual collection and reporting is time consuming and ineffective.</a:t>
+            </a:r>
+          </a:p>
+          <a:p>
             <a:r>
               <a:rPr lang="en-IN" b="1" dirty="0"/>
               <a:t>Proposed Solution</a:t>
@@ -6101,12 +6100,9 @@
           <a:p>
             <a:pPr algn="just"/>
             <a:r>
-              <a:rPr lang="en-IN" dirty="0"/>
-              <a:t>Develop an automated ETL pipeline that collects Apple stock market data, transforms and stores it in PostgreSQL, and visualizes business insights using Power BI.</a:t>
-            </a:r>
-          </a:p>
-          <a:p>
-            <a:pPr algn="just"/>
+              <a:rPr lang="en-US" dirty="0"/>
+              <a:t>Create an automated ETL pipeline to pull Apple market data and then transform and load the data into PostgreSQL and create the business insights using Power BI.</a:t>
+            </a:r>
             <a:endParaRPr lang="en-IN" dirty="0"/>
           </a:p>
         </p:txBody>
@@ -7069,7 +7065,7 @@
             </a:pPr>
             <a:r>
               <a:rPr lang="en-IN" dirty="0"/>
-              <a:t>Successfully developed a complete Business Intelligence solution that automates data extraction, transformation, loading, storage, and visualization for stock market analytics.</a:t>
+              <a:t>Successfully created an end to end Business Intelligence solution to automate data extraction, transformation, loading, storing and visualization for stock market analytics.</a:t>
             </a:r>
           </a:p>
         </p:txBody>
